--- a/Documents/Demo Report_Final.pptx
+++ b/Documents/Demo Report_Final.pptx
@@ -5,16 +5,18 @@
     <p:sldMasterId id="2147483672" r:id="rId1"/>
   </p:sldMasterIdLst>
   <p:notesMasterIdLst>
-    <p:notesMasterId r:id="rId6"/>
+    <p:notesMasterId r:id="rId8"/>
   </p:notesMasterIdLst>
   <p:handoutMasterIdLst>
-    <p:handoutMasterId r:id="rId7"/>
+    <p:handoutMasterId r:id="rId9"/>
   </p:handoutMasterIdLst>
   <p:sldIdLst>
     <p:sldId id="257" r:id="rId2"/>
     <p:sldId id="323" r:id="rId3"/>
-    <p:sldId id="258" r:id="rId4"/>
-    <p:sldId id="277" r:id="rId5"/>
+    <p:sldId id="325" r:id="rId4"/>
+    <p:sldId id="258" r:id="rId5"/>
+    <p:sldId id="324" r:id="rId6"/>
+    <p:sldId id="277" r:id="rId7"/>
   </p:sldIdLst>
   <p:sldSz cx="6858000" cy="9906000" type="A4"/>
   <p:notesSz cx="6858000" cy="9144000"/>
@@ -121,6 +123,104 @@
 </p:presentation>
 </file>
 
+<file path=ppt/revisionInfo.xml><?xml version="1.0" encoding="utf-8"?>
+<p1510:revInfo xmlns:a="http://schemas.openxmlformats.org/drawingml/2006/main" xmlns:r="http://schemas.openxmlformats.org/officeDocument/2006/relationships" xmlns:p1510="http://schemas.microsoft.com/office/powerpoint/2015/10/main">
+  <p1510:revLst>
+    <p1510:client id="{FCF4508F-5546-4782-90FF-30158A7D810D}" v="2" dt="2026-10-01T07:50:08.384"/>
+  </p1510:revLst>
+</p1510:revInfo>
+</file>
+
+<file path=ppt/changesInfos/changesInfo1.xml><?xml version="1.0" encoding="utf-8"?>
+<pc:chgInfo xmlns:a="http://schemas.openxmlformats.org/drawingml/2006/main" xmlns:r="http://schemas.openxmlformats.org/officeDocument/2006/relationships" xmlns:ac="http://schemas.microsoft.com/office/drawing/2013/main/command" xmlns:pc="http://schemas.microsoft.com/office/powerpoint/2013/main/command">
+  <pc:docChgLst>
+    <pc:chgData name="Yu Xiang Law" userId="dbcf09dde6a35e6a" providerId="LiveId" clId="{3285E46F-ACB3-488D-9540-F3C9E3F341F7}"/>
+    <pc:docChg chg="undo custSel addSld delSld modSld">
+      <pc:chgData name="Yu Xiang Law" userId="dbcf09dde6a35e6a" providerId="LiveId" clId="{3285E46F-ACB3-488D-9540-F3C9E3F341F7}" dt="2026-10-01T07:51:07.104" v="74" actId="20577"/>
+      <pc:docMkLst>
+        <pc:docMk/>
+      </pc:docMkLst>
+      <pc:sldChg chg="modSp mod">
+        <pc:chgData name="Yu Xiang Law" userId="dbcf09dde6a35e6a" providerId="LiveId" clId="{3285E46F-ACB3-488D-9540-F3C9E3F341F7}" dt="2026-10-01T07:50:48.651" v="70" actId="20577"/>
+        <pc:sldMkLst>
+          <pc:docMk/>
+          <pc:sldMk cId="3421455443" sldId="258"/>
+        </pc:sldMkLst>
+        <pc:spChg chg="mod">
+          <ac:chgData name="Yu Xiang Law" userId="dbcf09dde6a35e6a" providerId="LiveId" clId="{3285E46F-ACB3-488D-9540-F3C9E3F341F7}" dt="2026-10-01T07:50:48.651" v="70" actId="20577"/>
+          <ac:spMkLst>
+            <pc:docMk/>
+            <pc:sldMk cId="3421455443" sldId="258"/>
+            <ac:spMk id="9" creationId="{80EF23B3-81D3-4038-AB76-C0BD8F70D95D}"/>
+          </ac:spMkLst>
+        </pc:spChg>
+      </pc:sldChg>
+      <pc:sldChg chg="modSp mod">
+        <pc:chgData name="Yu Xiang Law" userId="dbcf09dde6a35e6a" providerId="LiveId" clId="{3285E46F-ACB3-488D-9540-F3C9E3F341F7}" dt="2026-10-01T07:51:07.104" v="74" actId="20577"/>
+        <pc:sldMkLst>
+          <pc:docMk/>
+          <pc:sldMk cId="972974019" sldId="277"/>
+        </pc:sldMkLst>
+        <pc:spChg chg="mod">
+          <ac:chgData name="Yu Xiang Law" userId="dbcf09dde6a35e6a" providerId="LiveId" clId="{3285E46F-ACB3-488D-9540-F3C9E3F341F7}" dt="2026-10-01T07:51:07.104" v="74" actId="20577"/>
+          <ac:spMkLst>
+            <pc:docMk/>
+            <pc:sldMk cId="972974019" sldId="277"/>
+            <ac:spMk id="234" creationId="{A1E56F2B-6F95-4AD9-80A4-C7617FBBD0D9}"/>
+          </ac:spMkLst>
+        </pc:spChg>
+      </pc:sldChg>
+      <pc:sldChg chg="modSp add del mod">
+        <pc:chgData name="Yu Xiang Law" userId="dbcf09dde6a35e6a" providerId="LiveId" clId="{3285E46F-ACB3-488D-9540-F3C9E3F341F7}" dt="2026-10-01T07:50:57.785" v="72" actId="20577"/>
+        <pc:sldMkLst>
+          <pc:docMk/>
+          <pc:sldMk cId="1776737012" sldId="324"/>
+        </pc:sldMkLst>
+        <pc:spChg chg="mod">
+          <ac:chgData name="Yu Xiang Law" userId="dbcf09dde6a35e6a" providerId="LiveId" clId="{3285E46F-ACB3-488D-9540-F3C9E3F341F7}" dt="2026-10-01T07:49:08.404" v="19" actId="20577"/>
+          <ac:spMkLst>
+            <pc:docMk/>
+            <pc:sldMk cId="1776737012" sldId="324"/>
+            <ac:spMk id="12" creationId="{3D097C54-0C94-3439-13D1-C36396CF8A7B}"/>
+          </ac:spMkLst>
+        </pc:spChg>
+        <pc:spChg chg="mod">
+          <ac:chgData name="Yu Xiang Law" userId="dbcf09dde6a35e6a" providerId="LiveId" clId="{3285E46F-ACB3-488D-9540-F3C9E3F341F7}" dt="2026-10-01T07:50:57.785" v="72" actId="20577"/>
+          <ac:spMkLst>
+            <pc:docMk/>
+            <pc:sldMk cId="1776737012" sldId="324"/>
+            <ac:spMk id="13" creationId="{FCF8BDA1-681E-6DD3-C176-9B9B6B89C973}"/>
+          </ac:spMkLst>
+        </pc:spChg>
+      </pc:sldChg>
+      <pc:sldChg chg="modSp add mod">
+        <pc:chgData name="Yu Xiang Law" userId="dbcf09dde6a35e6a" providerId="LiveId" clId="{3285E46F-ACB3-488D-9540-F3C9E3F341F7}" dt="2026-10-01T07:50:42.657" v="68" actId="20577"/>
+        <pc:sldMkLst>
+          <pc:docMk/>
+          <pc:sldMk cId="3321321044" sldId="325"/>
+        </pc:sldMkLst>
+        <pc:spChg chg="mod">
+          <ac:chgData name="Yu Xiang Law" userId="dbcf09dde6a35e6a" providerId="LiveId" clId="{3285E46F-ACB3-488D-9540-F3C9E3F341F7}" dt="2026-10-01T07:50:29.714" v="64" actId="20577"/>
+          <ac:spMkLst>
+            <pc:docMk/>
+            <pc:sldMk cId="3321321044" sldId="325"/>
+            <ac:spMk id="12" creationId="{81DD3F4F-B4D4-3D10-FDA3-060FDDCC0B92}"/>
+          </ac:spMkLst>
+        </pc:spChg>
+        <pc:spChg chg="mod">
+          <ac:chgData name="Yu Xiang Law" userId="dbcf09dde6a35e6a" providerId="LiveId" clId="{3285E46F-ACB3-488D-9540-F3C9E3F341F7}" dt="2026-10-01T07:50:42.657" v="68" actId="20577"/>
+          <ac:spMkLst>
+            <pc:docMk/>
+            <pc:sldMk cId="3321321044" sldId="325"/>
+            <ac:spMk id="13" creationId="{BD73560E-221F-2D3C-1215-86B2CD596106}"/>
+          </ac:spMkLst>
+        </pc:spChg>
+      </pc:sldChg>
+    </pc:docChg>
+  </pc:docChgLst>
+</pc:chgInfo>
+</file>
+
 <file path=ppt/handoutMasters/handoutMaster1.xml><?xml version="1.0" encoding="utf-8"?>
 <p:handoutMaster xmlns:a="http://schemas.openxmlformats.org/drawingml/2006/main" xmlns:r="http://schemas.openxmlformats.org/officeDocument/2006/relationships" xmlns:p="http://schemas.openxmlformats.org/presentationml/2006/main">
   <p:cSld>
@@ -218,7 +318,7 @@
           <a:p>
             <a:fld id="{1F71E745-AEF4-47D9-9DBA-EE2A82E5BB64}" type="datetimeFigureOut">
               <a:rPr lang="en-SG" smtClean="0"/>
-              <a:t>8/9/2026</a:t>
+              <a:t>1/10/2026</a:t>
             </a:fld>
             <a:endParaRPr lang="en-SG"/>
           </a:p>
@@ -402,7 +502,7 @@
           <a:p>
             <a:fld id="{9903E6BB-0CBD-426F-A9B3-9328214983D4}" type="datetimeFigureOut">
               <a:rPr lang="en-SG" smtClean="0"/>
-              <a:t>8/9/2026</a:t>
+              <a:t>1/10/2026</a:t>
             </a:fld>
             <a:endParaRPr lang="en-SG"/>
           </a:p>
@@ -805,7 +905,7 @@
           <a:p>
             <a:fld id="{43E8A11E-AA78-4123-9DC2-B990CF0F9410}" type="datetime1">
               <a:rPr lang="en-SG" smtClean="0"/>
-              <a:t>8/9/2026</a:t>
+              <a:t>1/10/2026</a:t>
             </a:fld>
             <a:endParaRPr lang="en-SG"/>
           </a:p>
@@ -978,7 +1078,7 @@
           <a:p>
             <a:fld id="{7CD92A80-4C36-478F-B445-8EEB75B57EEE}" type="datetime1">
               <a:rPr lang="en-SG" smtClean="0"/>
-              <a:t>8/9/2026</a:t>
+              <a:t>1/10/2026</a:t>
             </a:fld>
             <a:endParaRPr lang="en-SG"/>
           </a:p>
@@ -1161,7 +1261,7 @@
           <a:p>
             <a:fld id="{166F34C7-0A5E-4379-8AEE-36FAE40A87EA}" type="datetime1">
               <a:rPr lang="en-SG" smtClean="0"/>
-              <a:t>8/9/2026</a:t>
+              <a:t>1/10/2026</a:t>
             </a:fld>
             <a:endParaRPr lang="en-SG"/>
           </a:p>
@@ -1334,7 +1434,7 @@
           <a:p>
             <a:fld id="{13D7FA48-32E6-4BA0-BA3C-FC843A37D404}" type="datetime1">
               <a:rPr lang="en-SG" smtClean="0"/>
-              <a:t>8/9/2026</a:t>
+              <a:t>1/10/2026</a:t>
             </a:fld>
             <a:endParaRPr lang="en-SG"/>
           </a:p>
@@ -1581,7 +1681,7 @@
           <a:p>
             <a:fld id="{3639514C-CF59-46F0-8EF9-5632D58D9D68}" type="datetime1">
               <a:rPr lang="en-SG" smtClean="0"/>
-              <a:t>8/9/2026</a:t>
+              <a:t>1/10/2026</a:t>
             </a:fld>
             <a:endParaRPr lang="en-SG"/>
           </a:p>
@@ -1816,7 +1916,7 @@
           <a:p>
             <a:fld id="{F528E32B-D2B0-47EB-A942-2F7BF7CD0D9F}" type="datetime1">
               <a:rPr lang="en-SG" smtClean="0"/>
-              <a:t>8/9/2026</a:t>
+              <a:t>1/10/2026</a:t>
             </a:fld>
             <a:endParaRPr lang="en-SG"/>
           </a:p>
@@ -2186,7 +2286,7 @@
           <a:p>
             <a:fld id="{451409BA-0FF5-4AB6-BA5F-9FA2EC85D47E}" type="datetime1">
               <a:rPr lang="en-SG" smtClean="0"/>
-              <a:t>8/9/2026</a:t>
+              <a:t>1/10/2026</a:t>
             </a:fld>
             <a:endParaRPr lang="en-SG"/>
           </a:p>
@@ -2307,7 +2407,7 @@
           <a:p>
             <a:fld id="{D6311E0E-F73C-4FE4-A539-A1B3BCF2BADD}" type="datetime1">
               <a:rPr lang="en-SG" smtClean="0"/>
-              <a:t>8/9/2026</a:t>
+              <a:t>1/10/2026</a:t>
             </a:fld>
             <a:endParaRPr lang="en-SG"/>
           </a:p>
@@ -2405,7 +2505,7 @@
           <a:p>
             <a:fld id="{D8F4443F-D7DA-4098-A068-C67B5B17ACAD}" type="datetime1">
               <a:rPr lang="en-SG" smtClean="0"/>
-              <a:t>8/9/2026</a:t>
+              <a:t>1/10/2026</a:t>
             </a:fld>
             <a:endParaRPr lang="en-SG"/>
           </a:p>
@@ -2685,7 +2785,7 @@
           <a:p>
             <a:fld id="{6B804B04-FB72-40DE-891F-7FC8227C9384}" type="datetime1">
               <a:rPr lang="en-SG" smtClean="0"/>
-              <a:t>8/9/2026</a:t>
+              <a:t>1/10/2026</a:t>
             </a:fld>
             <a:endParaRPr lang="en-SG"/>
           </a:p>
@@ -2945,7 +3045,7 @@
           <a:p>
             <a:fld id="{A348C65B-D7CE-454C-B087-E23AD026212B}" type="datetime1">
               <a:rPr lang="en-SG" smtClean="0"/>
-              <a:t>8/9/2026</a:t>
+              <a:t>1/10/2026</a:t>
             </a:fld>
             <a:endParaRPr lang="en-SG"/>
           </a:p>
@@ -3161,7 +3261,7 @@
           <a:p>
             <a:fld id="{491C9C63-8B0E-42A4-8849-86ECF8E1E07C}" type="datetime1">
               <a:rPr lang="en-SG" smtClean="0"/>
-              <a:t>8/9/2026</a:t>
+              <a:t>1/10/2026</a:t>
             </a:fld>
             <a:endParaRPr lang="en-SG"/>
           </a:p>
@@ -4978,6 +5078,719 @@
   <p:cSld>
     <p:spTree>
       <p:nvGrpSpPr>
+        <p:cNvPr id="1" name="">
+          <a:extLst>
+            <a:ext uri="{FF2B5EF4-FFF2-40B4-BE49-F238E27FC236}">
+              <a16:creationId xmlns:a16="http://schemas.microsoft.com/office/drawing/2014/main" id="{166D6F12-D5B7-38D2-BC2F-4B5AC17F76A2}"/>
+            </a:ext>
+          </a:extLst>
+        </p:cNvPr>
+        <p:cNvGrpSpPr/>
+        <p:nvPr/>
+      </p:nvGrpSpPr>
+      <p:grpSpPr>
+        <a:xfrm>
+          <a:off x="0" y="0"/>
+          <a:ext cx="0" cy="0"/>
+          <a:chOff x="0" y="0"/>
+          <a:chExt cx="0" cy="0"/>
+        </a:xfrm>
+      </p:grpSpPr>
+      <p:sp>
+        <p:nvSpPr>
+          <p:cNvPr id="5" name="Rectangle 240">
+            <a:extLst>
+              <a:ext uri="{FF2B5EF4-FFF2-40B4-BE49-F238E27FC236}">
+                <a16:creationId xmlns:a16="http://schemas.microsoft.com/office/drawing/2014/main" id="{7AC15E61-E8FE-54CF-A66F-6FBF79826FA0}"/>
+              </a:ext>
+            </a:extLst>
+          </p:cNvPr>
+          <p:cNvSpPr>
+            <a:spLocks noChangeArrowheads="1"/>
+          </p:cNvSpPr>
+          <p:nvPr/>
+        </p:nvSpPr>
+        <p:spPr bwMode="auto">
+          <a:xfrm>
+            <a:off x="304800" y="940526"/>
+            <a:ext cx="6248400" cy="8465768"/>
+          </a:xfrm>
+          <a:prstGeom prst="rect">
+            <a:avLst/>
+          </a:prstGeom>
+          <a:noFill/>
+          <a:ln w="9525">
+            <a:solidFill>
+              <a:schemeClr val="tx1"/>
+            </a:solidFill>
+            <a:miter lim="800000"/>
+            <a:headEnd/>
+            <a:tailEnd/>
+          </a:ln>
+          <a:effectLst/>
+          <a:extLst>
+            <a:ext uri="{909E8E84-426E-40DD-AFC4-6F175D3DCCD1}">
+              <a14:hiddenFill xmlns:a14="http://schemas.microsoft.com/office/drawing/2010/main">
+                <a:solidFill>
+                  <a:schemeClr val="accent1"/>
+                </a:solidFill>
+              </a14:hiddenFill>
+            </a:ext>
+            <a:ext uri="{AF507438-7753-43E0-B8FC-AC1667EBCBE1}">
+              <a14:hiddenEffects xmlns:a14="http://schemas.microsoft.com/office/drawing/2010/main">
+                <a:effectLst>
+                  <a:outerShdw dist="35921" dir="2700000" algn="ctr" rotWithShape="0">
+                    <a:schemeClr val="bg2"/>
+                  </a:outerShdw>
+                </a:effectLst>
+              </a14:hiddenEffects>
+            </a:ext>
+          </a:extLst>
+        </p:spPr>
+        <p:txBody>
+          <a:bodyPr wrap="none" anchor="ctr"/>
+          <a:lstStyle/>
+          <a:p>
+            <a:endParaRPr lang="en-SG"/>
+          </a:p>
+        </p:txBody>
+      </p:sp>
+      <p:sp>
+        <p:nvSpPr>
+          <p:cNvPr id="12" name="Rectangle 3">
+            <a:extLst>
+              <a:ext uri="{FF2B5EF4-FFF2-40B4-BE49-F238E27FC236}">
+                <a16:creationId xmlns:a16="http://schemas.microsoft.com/office/drawing/2014/main" id="{81DD3F4F-B4D4-3D10-FDA3-060FDDCC0B92}"/>
+              </a:ext>
+            </a:extLst>
+          </p:cNvPr>
+          <p:cNvSpPr>
+            <a:spLocks noChangeArrowheads="1"/>
+          </p:cNvSpPr>
+          <p:nvPr/>
+        </p:nvSpPr>
+        <p:spPr bwMode="auto">
+          <a:xfrm>
+            <a:off x="519113" y="379413"/>
+            <a:ext cx="5897562" cy="533681"/>
+          </a:xfrm>
+          <a:prstGeom prst="rect">
+            <a:avLst/>
+          </a:prstGeom>
+          <a:noFill/>
+          <a:ln>
+            <a:noFill/>
+          </a:ln>
+          <a:extLst>
+            <a:ext uri="{909E8E84-426E-40DD-AFC4-6F175D3DCCD1}">
+              <a14:hiddenFill xmlns:a14="http://schemas.microsoft.com/office/drawing/2010/main">
+                <a:solidFill>
+                  <a:srgbClr val="FFFFFF"/>
+                </a:solidFill>
+              </a14:hiddenFill>
+            </a:ext>
+            <a:ext uri="{91240B29-F687-4F45-9708-019B960494DF}">
+              <a14:hiddenLine xmlns:a14="http://schemas.microsoft.com/office/drawing/2010/main" w="12700">
+                <a:solidFill>
+                  <a:srgbClr val="000000"/>
+                </a:solidFill>
+                <a:miter lim="800000"/>
+                <a:headEnd/>
+                <a:tailEnd/>
+              </a14:hiddenLine>
+            </a:ext>
+          </a:extLst>
+        </p:spPr>
+        <p:txBody>
+          <a:bodyPr lIns="82923" tIns="40734" rIns="82923" bIns="40734">
+            <a:normAutofit/>
+          </a:bodyPr>
+          <a:lstStyle>
+            <a:lvl1pPr defTabSz="838200">
+              <a:defRPr sz="2400">
+                <a:solidFill>
+                  <a:schemeClr val="tx1"/>
+                </a:solidFill>
+                <a:latin typeface="Times New Roman" panose="02020603050405020304" pitchFamily="18" charset="0"/>
+              </a:defRPr>
+            </a:lvl1pPr>
+            <a:lvl2pPr marL="742950" indent="-285750" defTabSz="838200">
+              <a:defRPr sz="2400">
+                <a:solidFill>
+                  <a:schemeClr val="tx1"/>
+                </a:solidFill>
+                <a:latin typeface="Times New Roman" panose="02020603050405020304" pitchFamily="18" charset="0"/>
+              </a:defRPr>
+            </a:lvl2pPr>
+            <a:lvl3pPr marL="1143000" indent="-228600" defTabSz="838200">
+              <a:defRPr sz="2400">
+                <a:solidFill>
+                  <a:schemeClr val="tx1"/>
+                </a:solidFill>
+                <a:latin typeface="Times New Roman" panose="02020603050405020304" pitchFamily="18" charset="0"/>
+              </a:defRPr>
+            </a:lvl3pPr>
+            <a:lvl4pPr marL="1600200" indent="-228600" defTabSz="838200">
+              <a:defRPr sz="2400">
+                <a:solidFill>
+                  <a:schemeClr val="tx1"/>
+                </a:solidFill>
+                <a:latin typeface="Times New Roman" panose="02020603050405020304" pitchFamily="18" charset="0"/>
+              </a:defRPr>
+            </a:lvl4pPr>
+            <a:lvl5pPr marL="2057400" indent="-228600" defTabSz="838200">
+              <a:defRPr sz="2400">
+                <a:solidFill>
+                  <a:schemeClr val="tx1"/>
+                </a:solidFill>
+                <a:latin typeface="Times New Roman" panose="02020603050405020304" pitchFamily="18" charset="0"/>
+              </a:defRPr>
+            </a:lvl5pPr>
+            <a:lvl6pPr marL="2514600" indent="-228600" defTabSz="838200" eaLnBrk="0" fontAlgn="base" hangingPunct="0">
+              <a:spcBef>
+                <a:spcPct val="0"/>
+              </a:spcBef>
+              <a:spcAft>
+                <a:spcPct val="0"/>
+              </a:spcAft>
+              <a:defRPr sz="2400">
+                <a:solidFill>
+                  <a:schemeClr val="tx1"/>
+                </a:solidFill>
+                <a:latin typeface="Times New Roman" panose="02020603050405020304" pitchFamily="18" charset="0"/>
+              </a:defRPr>
+            </a:lvl6pPr>
+            <a:lvl7pPr marL="2971800" indent="-228600" defTabSz="838200" eaLnBrk="0" fontAlgn="base" hangingPunct="0">
+              <a:spcBef>
+                <a:spcPct val="0"/>
+              </a:spcBef>
+              <a:spcAft>
+                <a:spcPct val="0"/>
+              </a:spcAft>
+              <a:defRPr sz="2400">
+                <a:solidFill>
+                  <a:schemeClr val="tx1"/>
+                </a:solidFill>
+                <a:latin typeface="Times New Roman" panose="02020603050405020304" pitchFamily="18" charset="0"/>
+              </a:defRPr>
+            </a:lvl7pPr>
+            <a:lvl8pPr marL="3429000" indent="-228600" defTabSz="838200" eaLnBrk="0" fontAlgn="base" hangingPunct="0">
+              <a:spcBef>
+                <a:spcPct val="0"/>
+              </a:spcBef>
+              <a:spcAft>
+                <a:spcPct val="0"/>
+              </a:spcAft>
+              <a:defRPr sz="2400">
+                <a:solidFill>
+                  <a:schemeClr val="tx1"/>
+                </a:solidFill>
+                <a:latin typeface="Times New Roman" panose="02020603050405020304" pitchFamily="18" charset="0"/>
+              </a:defRPr>
+            </a:lvl8pPr>
+            <a:lvl9pPr marL="3886200" indent="-228600" defTabSz="838200" eaLnBrk="0" fontAlgn="base" hangingPunct="0">
+              <a:spcBef>
+                <a:spcPct val="0"/>
+              </a:spcBef>
+              <a:spcAft>
+                <a:spcPct val="0"/>
+              </a:spcAft>
+              <a:defRPr sz="2400">
+                <a:solidFill>
+                  <a:schemeClr val="tx1"/>
+                </a:solidFill>
+                <a:latin typeface="Times New Roman" panose="02020603050405020304" pitchFamily="18" charset="0"/>
+              </a:defRPr>
+            </a:lvl9pPr>
+          </a:lstStyle>
+          <a:p>
+            <a:r>
+              <a:rPr lang="en-US" altLang="en-US" sz="1400" b="1" u="sng" dirty="0">
+                <a:latin typeface="Arial" panose="020B0604020202020204" pitchFamily="34" charset="0"/>
+                <a:ea typeface="Arial Bold" panose="020B0704020202020204" pitchFamily="34" charset="0"/>
+                <a:cs typeface="Arial" panose="020B0604020202020204" pitchFamily="34" charset="0"/>
+                <a:sym typeface="Arial Bold" panose="020B0704020202020204" pitchFamily="34" charset="0"/>
+              </a:rPr>
+              <a:t>AFFECTED AREA LAYOUT PLAN:</a:t>
+            </a:r>
+            <a:endParaRPr lang="en-US" altLang="en-US" sz="1400" b="1" dirty="0">
+              <a:latin typeface="Arial" panose="020B0604020202020204" pitchFamily="34" charset="0"/>
+              <a:ea typeface="Arial Bold" panose="020B0704020202020204" pitchFamily="34" charset="0"/>
+              <a:cs typeface="Arial" panose="020B0604020202020204" pitchFamily="34" charset="0"/>
+              <a:sym typeface="Arial" panose="020B0604020202020204" pitchFamily="34" charset="0"/>
+            </a:endParaRPr>
+          </a:p>
+        </p:txBody>
+      </p:sp>
+      <p:sp>
+        <p:nvSpPr>
+          <p:cNvPr id="13" name="Rectangle 4">
+            <a:extLst>
+              <a:ext uri="{FF2B5EF4-FFF2-40B4-BE49-F238E27FC236}">
+                <a16:creationId xmlns:a16="http://schemas.microsoft.com/office/drawing/2014/main" id="{BD73560E-221F-2D3C-1215-86B2CD596106}"/>
+              </a:ext>
+            </a:extLst>
+          </p:cNvPr>
+          <p:cNvSpPr>
+            <a:spLocks noChangeArrowheads="1"/>
+          </p:cNvSpPr>
+          <p:nvPr/>
+        </p:nvSpPr>
+        <p:spPr bwMode="auto">
+          <a:xfrm>
+            <a:off x="5715000" y="150813"/>
+            <a:ext cx="1114841" cy="297707"/>
+          </a:xfrm>
+          <a:prstGeom prst="rect">
+            <a:avLst/>
+          </a:prstGeom>
+          <a:noFill/>
+          <a:ln>
+            <a:noFill/>
+          </a:ln>
+          <a:extLst>
+            <a:ext uri="{909E8E84-426E-40DD-AFC4-6F175D3DCCD1}">
+              <a14:hiddenFill xmlns:a14="http://schemas.microsoft.com/office/drawing/2010/main">
+                <a:solidFill>
+                  <a:srgbClr val="FFFFFF"/>
+                </a:solidFill>
+              </a14:hiddenFill>
+            </a:ext>
+            <a:ext uri="{91240B29-F687-4F45-9708-019B960494DF}">
+              <a14:hiddenLine xmlns:a14="http://schemas.microsoft.com/office/drawing/2010/main" w="12700">
+                <a:solidFill>
+                  <a:srgbClr val="000000"/>
+                </a:solidFill>
+                <a:miter lim="800000"/>
+                <a:headEnd/>
+                <a:tailEnd/>
+              </a14:hiddenLine>
+            </a:ext>
+          </a:extLst>
+        </p:spPr>
+        <p:txBody>
+          <a:bodyPr wrap="none" lIns="82923" tIns="40734" rIns="82923" bIns="40734">
+            <a:spAutoFit/>
+          </a:bodyPr>
+          <a:lstStyle>
+            <a:lvl1pPr defTabSz="838200">
+              <a:defRPr sz="2400">
+                <a:solidFill>
+                  <a:schemeClr val="tx1"/>
+                </a:solidFill>
+                <a:latin typeface="Times New Roman" panose="02020603050405020304" pitchFamily="18" charset="0"/>
+              </a:defRPr>
+            </a:lvl1pPr>
+            <a:lvl2pPr marL="742950" indent="-285750" defTabSz="838200">
+              <a:defRPr sz="2400">
+                <a:solidFill>
+                  <a:schemeClr val="tx1"/>
+                </a:solidFill>
+                <a:latin typeface="Times New Roman" panose="02020603050405020304" pitchFamily="18" charset="0"/>
+              </a:defRPr>
+            </a:lvl2pPr>
+            <a:lvl3pPr marL="1143000" indent="-228600" defTabSz="838200">
+              <a:defRPr sz="2400">
+                <a:solidFill>
+                  <a:schemeClr val="tx1"/>
+                </a:solidFill>
+                <a:latin typeface="Times New Roman" panose="02020603050405020304" pitchFamily="18" charset="0"/>
+              </a:defRPr>
+            </a:lvl3pPr>
+            <a:lvl4pPr marL="1600200" indent="-228600" defTabSz="838200">
+              <a:defRPr sz="2400">
+                <a:solidFill>
+                  <a:schemeClr val="tx1"/>
+                </a:solidFill>
+                <a:latin typeface="Times New Roman" panose="02020603050405020304" pitchFamily="18" charset="0"/>
+              </a:defRPr>
+            </a:lvl4pPr>
+            <a:lvl5pPr marL="2057400" indent="-228600" defTabSz="838200">
+              <a:defRPr sz="2400">
+                <a:solidFill>
+                  <a:schemeClr val="tx1"/>
+                </a:solidFill>
+                <a:latin typeface="Times New Roman" panose="02020603050405020304" pitchFamily="18" charset="0"/>
+              </a:defRPr>
+            </a:lvl5pPr>
+            <a:lvl6pPr marL="2514600" indent="-228600" defTabSz="838200" eaLnBrk="0" fontAlgn="base" hangingPunct="0">
+              <a:spcBef>
+                <a:spcPct val="0"/>
+              </a:spcBef>
+              <a:spcAft>
+                <a:spcPct val="0"/>
+              </a:spcAft>
+              <a:defRPr sz="2400">
+                <a:solidFill>
+                  <a:schemeClr val="tx1"/>
+                </a:solidFill>
+                <a:latin typeface="Times New Roman" panose="02020603050405020304" pitchFamily="18" charset="0"/>
+              </a:defRPr>
+            </a:lvl6pPr>
+            <a:lvl7pPr marL="2971800" indent="-228600" defTabSz="838200" eaLnBrk="0" fontAlgn="base" hangingPunct="0">
+              <a:spcBef>
+                <a:spcPct val="0"/>
+              </a:spcBef>
+              <a:spcAft>
+                <a:spcPct val="0"/>
+              </a:spcAft>
+              <a:defRPr sz="2400">
+                <a:solidFill>
+                  <a:schemeClr val="tx1"/>
+                </a:solidFill>
+                <a:latin typeface="Times New Roman" panose="02020603050405020304" pitchFamily="18" charset="0"/>
+              </a:defRPr>
+            </a:lvl7pPr>
+            <a:lvl8pPr marL="3429000" indent="-228600" defTabSz="838200" eaLnBrk="0" fontAlgn="base" hangingPunct="0">
+              <a:spcBef>
+                <a:spcPct val="0"/>
+              </a:spcBef>
+              <a:spcAft>
+                <a:spcPct val="0"/>
+              </a:spcAft>
+              <a:defRPr sz="2400">
+                <a:solidFill>
+                  <a:schemeClr val="tx1"/>
+                </a:solidFill>
+                <a:latin typeface="Times New Roman" panose="02020603050405020304" pitchFamily="18" charset="0"/>
+              </a:defRPr>
+            </a:lvl8pPr>
+            <a:lvl9pPr marL="3886200" indent="-228600" defTabSz="838200" eaLnBrk="0" fontAlgn="base" hangingPunct="0">
+              <a:spcBef>
+                <a:spcPct val="0"/>
+              </a:spcBef>
+              <a:spcAft>
+                <a:spcPct val="0"/>
+              </a:spcAft>
+              <a:defRPr sz="2400">
+                <a:solidFill>
+                  <a:schemeClr val="tx1"/>
+                </a:solidFill>
+                <a:latin typeface="Times New Roman" panose="02020603050405020304" pitchFamily="18" charset="0"/>
+              </a:defRPr>
+            </a:lvl9pPr>
+          </a:lstStyle>
+          <a:p>
+            <a:r>
+              <a:rPr lang="en-US" altLang="en-US" sz="1400" b="1" u="sng" dirty="0">
+                <a:latin typeface="Arial" panose="020B0604020202020204" pitchFamily="34" charset="0"/>
+              </a:rPr>
+              <a:t>SECTION 3</a:t>
+            </a:r>
+          </a:p>
+        </p:txBody>
+      </p:sp>
+      <p:sp>
+        <p:nvSpPr>
+          <p:cNvPr id="17" name="Text Box 8">
+            <a:extLst>
+              <a:ext uri="{FF2B5EF4-FFF2-40B4-BE49-F238E27FC236}">
+                <a16:creationId xmlns:a16="http://schemas.microsoft.com/office/drawing/2014/main" id="{A6461B4D-B7C6-FD69-6D18-AE021C671E3F}"/>
+              </a:ext>
+            </a:extLst>
+          </p:cNvPr>
+          <p:cNvSpPr txBox="1">
+            <a:spLocks noChangeArrowheads="1"/>
+          </p:cNvSpPr>
+          <p:nvPr/>
+        </p:nvSpPr>
+        <p:spPr bwMode="auto">
+          <a:xfrm>
+            <a:off x="0" y="9507538"/>
+            <a:ext cx="6858000" cy="244475"/>
+          </a:xfrm>
+          <a:prstGeom prst="rect">
+            <a:avLst/>
+          </a:prstGeom>
+          <a:noFill/>
+          <a:ln>
+            <a:noFill/>
+          </a:ln>
+          <a:extLst>
+            <a:ext uri="{909E8E84-426E-40DD-AFC4-6F175D3DCCD1}">
+              <a14:hiddenFill xmlns:a14="http://schemas.microsoft.com/office/drawing/2010/main">
+                <a:solidFill>
+                  <a:srgbClr val="FFFFFF"/>
+                </a:solidFill>
+              </a14:hiddenFill>
+            </a:ext>
+            <a:ext uri="{91240B29-F687-4F45-9708-019B960494DF}">
+              <a14:hiddenLine xmlns:a14="http://schemas.microsoft.com/office/drawing/2010/main" w="12700">
+                <a:solidFill>
+                  <a:srgbClr val="000000"/>
+                </a:solidFill>
+                <a:miter lim="800000"/>
+                <a:headEnd/>
+                <a:tailEnd/>
+              </a14:hiddenLine>
+            </a:ext>
+          </a:extLst>
+        </p:spPr>
+        <p:txBody>
+          <a:bodyPr>
+            <a:spAutoFit/>
+          </a:bodyPr>
+          <a:lstStyle>
+            <a:lvl1pPr>
+              <a:defRPr sz="2400">
+                <a:solidFill>
+                  <a:schemeClr val="tx1"/>
+                </a:solidFill>
+                <a:latin typeface="Times New Roman" panose="02020603050405020304" pitchFamily="18" charset="0"/>
+              </a:defRPr>
+            </a:lvl1pPr>
+            <a:lvl2pPr marL="742950" indent="-285750">
+              <a:defRPr sz="2400">
+                <a:solidFill>
+                  <a:schemeClr val="tx1"/>
+                </a:solidFill>
+                <a:latin typeface="Times New Roman" panose="02020603050405020304" pitchFamily="18" charset="0"/>
+              </a:defRPr>
+            </a:lvl2pPr>
+            <a:lvl3pPr marL="1143000" indent="-228600">
+              <a:defRPr sz="2400">
+                <a:solidFill>
+                  <a:schemeClr val="tx1"/>
+                </a:solidFill>
+                <a:latin typeface="Times New Roman" panose="02020603050405020304" pitchFamily="18" charset="0"/>
+              </a:defRPr>
+            </a:lvl3pPr>
+            <a:lvl4pPr marL="1600200" indent="-228600">
+              <a:defRPr sz="2400">
+                <a:solidFill>
+                  <a:schemeClr val="tx1"/>
+                </a:solidFill>
+                <a:latin typeface="Times New Roman" panose="02020603050405020304" pitchFamily="18" charset="0"/>
+              </a:defRPr>
+            </a:lvl4pPr>
+            <a:lvl5pPr marL="2057400" indent="-228600">
+              <a:defRPr sz="2400">
+                <a:solidFill>
+                  <a:schemeClr val="tx1"/>
+                </a:solidFill>
+                <a:latin typeface="Times New Roman" panose="02020603050405020304" pitchFamily="18" charset="0"/>
+              </a:defRPr>
+            </a:lvl5pPr>
+            <a:lvl6pPr marL="2514600" indent="-228600" eaLnBrk="0" fontAlgn="base" hangingPunct="0">
+              <a:spcBef>
+                <a:spcPct val="0"/>
+              </a:spcBef>
+              <a:spcAft>
+                <a:spcPct val="0"/>
+              </a:spcAft>
+              <a:defRPr sz="2400">
+                <a:solidFill>
+                  <a:schemeClr val="tx1"/>
+                </a:solidFill>
+                <a:latin typeface="Times New Roman" panose="02020603050405020304" pitchFamily="18" charset="0"/>
+              </a:defRPr>
+            </a:lvl6pPr>
+            <a:lvl7pPr marL="2971800" indent="-228600" eaLnBrk="0" fontAlgn="base" hangingPunct="0">
+              <a:spcBef>
+                <a:spcPct val="0"/>
+              </a:spcBef>
+              <a:spcAft>
+                <a:spcPct val="0"/>
+              </a:spcAft>
+              <a:defRPr sz="2400">
+                <a:solidFill>
+                  <a:schemeClr val="tx1"/>
+                </a:solidFill>
+                <a:latin typeface="Times New Roman" panose="02020603050405020304" pitchFamily="18" charset="0"/>
+              </a:defRPr>
+            </a:lvl7pPr>
+            <a:lvl8pPr marL="3429000" indent="-228600" eaLnBrk="0" fontAlgn="base" hangingPunct="0">
+              <a:spcBef>
+                <a:spcPct val="0"/>
+              </a:spcBef>
+              <a:spcAft>
+                <a:spcPct val="0"/>
+              </a:spcAft>
+              <a:defRPr sz="2400">
+                <a:solidFill>
+                  <a:schemeClr val="tx1"/>
+                </a:solidFill>
+                <a:latin typeface="Times New Roman" panose="02020603050405020304" pitchFamily="18" charset="0"/>
+              </a:defRPr>
+            </a:lvl8pPr>
+            <a:lvl9pPr marL="3886200" indent="-228600" eaLnBrk="0" fontAlgn="base" hangingPunct="0">
+              <a:spcBef>
+                <a:spcPct val="0"/>
+              </a:spcBef>
+              <a:spcAft>
+                <a:spcPct val="0"/>
+              </a:spcAft>
+              <a:defRPr sz="2400">
+                <a:solidFill>
+                  <a:schemeClr val="tx1"/>
+                </a:solidFill>
+                <a:latin typeface="Times New Roman" panose="02020603050405020304" pitchFamily="18" charset="0"/>
+              </a:defRPr>
+            </a:lvl9pPr>
+          </a:lstStyle>
+          <a:p>
+            <a:pPr algn="ctr">
+              <a:spcBef>
+                <a:spcPct val="50000"/>
+              </a:spcBef>
+            </a:pPr>
+            <a:r>
+              <a:rPr lang="en-US" altLang="en-US" sz="1000" b="1" dirty="0">
+                <a:latin typeface="Arial" panose="020B0604020202020204" pitchFamily="34" charset="0"/>
+              </a:rPr>
+              <a:t>2 - 01</a:t>
+            </a:r>
+          </a:p>
+        </p:txBody>
+      </p:sp>
+      <p:sp>
+        <p:nvSpPr>
+          <p:cNvPr id="7" name="Footer Placeholder 1">
+            <a:extLst>
+              <a:ext uri="{FF2B5EF4-FFF2-40B4-BE49-F238E27FC236}">
+                <a16:creationId xmlns:a16="http://schemas.microsoft.com/office/drawing/2014/main" id="{89C0EB67-520C-FBC7-BBCC-1A1FB253A507}"/>
+              </a:ext>
+            </a:extLst>
+          </p:cNvPr>
+          <p:cNvSpPr txBox="1">
+            <a:spLocks/>
+          </p:cNvSpPr>
+          <p:nvPr/>
+        </p:nvSpPr>
+        <p:spPr>
+          <a:xfrm>
+            <a:off x="2310606" y="191633"/>
+            <a:ext cx="2314575" cy="155643"/>
+          </a:xfrm>
+          <a:prstGeom prst="rect">
+            <a:avLst/>
+          </a:prstGeom>
+        </p:spPr>
+        <p:txBody>
+          <a:bodyPr vert="horz" lIns="91440" tIns="45720" rIns="91440" bIns="45720" rtlCol="0" anchor="ctr"/>
+          <a:lstStyle>
+            <a:defPPr>
+              <a:defRPr lang="en-US"/>
+            </a:defPPr>
+            <a:lvl1pPr marL="0" algn="ctr" defTabSz="457200" rtl="0" eaLnBrk="1" latinLnBrk="0" hangingPunct="1">
+              <a:defRPr sz="900" kern="1200">
+                <a:solidFill>
+                  <a:schemeClr val="tx1">
+                    <a:tint val="75000"/>
+                  </a:schemeClr>
+                </a:solidFill>
+                <a:latin typeface="+mn-lt"/>
+                <a:ea typeface="+mn-ea"/>
+                <a:cs typeface="+mn-cs"/>
+              </a:defRPr>
+            </a:lvl1pPr>
+            <a:lvl2pPr marL="457200" algn="l" defTabSz="457200" rtl="0" eaLnBrk="1" latinLnBrk="0" hangingPunct="1">
+              <a:defRPr sz="1800" kern="1200">
+                <a:solidFill>
+                  <a:schemeClr val="tx1"/>
+                </a:solidFill>
+                <a:latin typeface="+mn-lt"/>
+                <a:ea typeface="+mn-ea"/>
+                <a:cs typeface="+mn-cs"/>
+              </a:defRPr>
+            </a:lvl2pPr>
+            <a:lvl3pPr marL="914400" algn="l" defTabSz="457200" rtl="0" eaLnBrk="1" latinLnBrk="0" hangingPunct="1">
+              <a:defRPr sz="1800" kern="1200">
+                <a:solidFill>
+                  <a:schemeClr val="tx1"/>
+                </a:solidFill>
+                <a:latin typeface="+mn-lt"/>
+                <a:ea typeface="+mn-ea"/>
+                <a:cs typeface="+mn-cs"/>
+              </a:defRPr>
+            </a:lvl3pPr>
+            <a:lvl4pPr marL="1371600" algn="l" defTabSz="457200" rtl="0" eaLnBrk="1" latinLnBrk="0" hangingPunct="1">
+              <a:defRPr sz="1800" kern="1200">
+                <a:solidFill>
+                  <a:schemeClr val="tx1"/>
+                </a:solidFill>
+                <a:latin typeface="+mn-lt"/>
+                <a:ea typeface="+mn-ea"/>
+                <a:cs typeface="+mn-cs"/>
+              </a:defRPr>
+            </a:lvl4pPr>
+            <a:lvl5pPr marL="1828800" algn="l" defTabSz="457200" rtl="0" eaLnBrk="1" latinLnBrk="0" hangingPunct="1">
+              <a:defRPr sz="1800" kern="1200">
+                <a:solidFill>
+                  <a:schemeClr val="tx1"/>
+                </a:solidFill>
+                <a:latin typeface="+mn-lt"/>
+                <a:ea typeface="+mn-ea"/>
+                <a:cs typeface="+mn-cs"/>
+              </a:defRPr>
+            </a:lvl5pPr>
+            <a:lvl6pPr marL="2286000" algn="l" defTabSz="457200" rtl="0" eaLnBrk="1" latinLnBrk="0" hangingPunct="1">
+              <a:defRPr sz="1800" kern="1200">
+                <a:solidFill>
+                  <a:schemeClr val="tx1"/>
+                </a:solidFill>
+                <a:latin typeface="+mn-lt"/>
+                <a:ea typeface="+mn-ea"/>
+                <a:cs typeface="+mn-cs"/>
+              </a:defRPr>
+            </a:lvl6pPr>
+            <a:lvl7pPr marL="2743200" algn="l" defTabSz="457200" rtl="0" eaLnBrk="1" latinLnBrk="0" hangingPunct="1">
+              <a:defRPr sz="1800" kern="1200">
+                <a:solidFill>
+                  <a:schemeClr val="tx1"/>
+                </a:solidFill>
+                <a:latin typeface="+mn-lt"/>
+                <a:ea typeface="+mn-ea"/>
+                <a:cs typeface="+mn-cs"/>
+              </a:defRPr>
+            </a:lvl7pPr>
+            <a:lvl8pPr marL="3200400" algn="l" defTabSz="457200" rtl="0" eaLnBrk="1" latinLnBrk="0" hangingPunct="1">
+              <a:defRPr sz="1800" kern="1200">
+                <a:solidFill>
+                  <a:schemeClr val="tx1"/>
+                </a:solidFill>
+                <a:latin typeface="+mn-lt"/>
+                <a:ea typeface="+mn-ea"/>
+                <a:cs typeface="+mn-cs"/>
+              </a:defRPr>
+            </a:lvl8pPr>
+            <a:lvl9pPr marL="3657600" algn="l" defTabSz="457200" rtl="0" eaLnBrk="1" latinLnBrk="0" hangingPunct="1">
+              <a:defRPr sz="1800" kern="1200">
+                <a:solidFill>
+                  <a:schemeClr val="tx1"/>
+                </a:solidFill>
+                <a:latin typeface="+mn-lt"/>
+                <a:ea typeface="+mn-ea"/>
+                <a:cs typeface="+mn-cs"/>
+              </a:defRPr>
+            </a:lvl9pPr>
+          </a:lstStyle>
+          <a:p>
+            <a:r>
+              <a:rPr lang="en-SG" dirty="0"/>
+              <a:t>FIRETRACK AI</a:t>
+            </a:r>
+          </a:p>
+        </p:txBody>
+      </p:sp>
+    </p:spTree>
+    <p:extLst>
+      <p:ext uri="{BB962C8B-B14F-4D97-AF65-F5344CB8AC3E}">
+        <p14:creationId xmlns:p14="http://schemas.microsoft.com/office/powerpoint/2010/main" val="3321321044"/>
+      </p:ext>
+    </p:extLst>
+  </p:cSld>
+  <p:clrMapOvr>
+    <a:masterClrMapping/>
+  </p:clrMapOvr>
+</p:sld>
+</file>
+
+<file path=ppt/slides/slide4.xml><?xml version="1.0" encoding="utf-8"?>
+<p:sld xmlns:a="http://schemas.openxmlformats.org/drawingml/2006/main" xmlns:r="http://schemas.openxmlformats.org/officeDocument/2006/relationships" xmlns:p="http://schemas.openxmlformats.org/presentationml/2006/main">
+  <p:cSld>
+    <p:spTree>
+      <p:nvGrpSpPr>
         <p:cNvPr id="1" name=""/>
         <p:cNvGrpSpPr/>
         <p:nvPr/>
@@ -5357,7 +6170,7 @@
               <a:rPr lang="en-US" altLang="en-US" sz="1400" b="1" u="sng" dirty="0">
                 <a:latin typeface="Arial" panose="020B0604020202020204" pitchFamily="34" charset="0"/>
               </a:rPr>
-              <a:t>SECTION 3</a:t>
+              <a:t>SECTION 4</a:t>
             </a:r>
           </a:p>
         </p:txBody>
@@ -6271,7 +7084,720 @@
 </p:sld>
 </file>
 
-<file path=ppt/slides/slide4.xml><?xml version="1.0" encoding="utf-8"?>
+<file path=ppt/slides/slide5.xml><?xml version="1.0" encoding="utf-8"?>
+<p:sld xmlns:a="http://schemas.openxmlformats.org/drawingml/2006/main" xmlns:r="http://schemas.openxmlformats.org/officeDocument/2006/relationships" xmlns:p="http://schemas.openxmlformats.org/presentationml/2006/main">
+  <p:cSld>
+    <p:spTree>
+      <p:nvGrpSpPr>
+        <p:cNvPr id="1" name="">
+          <a:extLst>
+            <a:ext uri="{FF2B5EF4-FFF2-40B4-BE49-F238E27FC236}">
+              <a16:creationId xmlns:a16="http://schemas.microsoft.com/office/drawing/2014/main" id="{A9083D84-CA43-C09F-AF4B-47ABAEC360AA}"/>
+            </a:ext>
+          </a:extLst>
+        </p:cNvPr>
+        <p:cNvGrpSpPr/>
+        <p:nvPr/>
+      </p:nvGrpSpPr>
+      <p:grpSpPr>
+        <a:xfrm>
+          <a:off x="0" y="0"/>
+          <a:ext cx="0" cy="0"/>
+          <a:chOff x="0" y="0"/>
+          <a:chExt cx="0" cy="0"/>
+        </a:xfrm>
+      </p:grpSpPr>
+      <p:sp>
+        <p:nvSpPr>
+          <p:cNvPr id="5" name="Rectangle 240">
+            <a:extLst>
+              <a:ext uri="{FF2B5EF4-FFF2-40B4-BE49-F238E27FC236}">
+                <a16:creationId xmlns:a16="http://schemas.microsoft.com/office/drawing/2014/main" id="{E883487C-CF6A-682A-761B-43344B97F649}"/>
+              </a:ext>
+            </a:extLst>
+          </p:cNvPr>
+          <p:cNvSpPr>
+            <a:spLocks noChangeArrowheads="1"/>
+          </p:cNvSpPr>
+          <p:nvPr/>
+        </p:nvSpPr>
+        <p:spPr bwMode="auto">
+          <a:xfrm>
+            <a:off x="304800" y="940526"/>
+            <a:ext cx="6248400" cy="8465768"/>
+          </a:xfrm>
+          <a:prstGeom prst="rect">
+            <a:avLst/>
+          </a:prstGeom>
+          <a:noFill/>
+          <a:ln w="9525">
+            <a:solidFill>
+              <a:schemeClr val="tx1"/>
+            </a:solidFill>
+            <a:miter lim="800000"/>
+            <a:headEnd/>
+            <a:tailEnd/>
+          </a:ln>
+          <a:effectLst/>
+          <a:extLst>
+            <a:ext uri="{909E8E84-426E-40DD-AFC4-6F175D3DCCD1}">
+              <a14:hiddenFill xmlns:a14="http://schemas.microsoft.com/office/drawing/2010/main">
+                <a:solidFill>
+                  <a:schemeClr val="accent1"/>
+                </a:solidFill>
+              </a14:hiddenFill>
+            </a:ext>
+            <a:ext uri="{AF507438-7753-43E0-B8FC-AC1667EBCBE1}">
+              <a14:hiddenEffects xmlns:a14="http://schemas.microsoft.com/office/drawing/2010/main">
+                <a:effectLst>
+                  <a:outerShdw dist="35921" dir="2700000" algn="ctr" rotWithShape="0">
+                    <a:schemeClr val="bg2"/>
+                  </a:outerShdw>
+                </a:effectLst>
+              </a14:hiddenEffects>
+            </a:ext>
+          </a:extLst>
+        </p:spPr>
+        <p:txBody>
+          <a:bodyPr wrap="none" anchor="ctr"/>
+          <a:lstStyle/>
+          <a:p>
+            <a:endParaRPr lang="en-SG"/>
+          </a:p>
+        </p:txBody>
+      </p:sp>
+      <p:sp>
+        <p:nvSpPr>
+          <p:cNvPr id="12" name="Rectangle 3">
+            <a:extLst>
+              <a:ext uri="{FF2B5EF4-FFF2-40B4-BE49-F238E27FC236}">
+                <a16:creationId xmlns:a16="http://schemas.microsoft.com/office/drawing/2014/main" id="{3D097C54-0C94-3439-13D1-C36396CF8A7B}"/>
+              </a:ext>
+            </a:extLst>
+          </p:cNvPr>
+          <p:cNvSpPr>
+            <a:spLocks noChangeArrowheads="1"/>
+          </p:cNvSpPr>
+          <p:nvPr/>
+        </p:nvSpPr>
+        <p:spPr bwMode="auto">
+          <a:xfrm>
+            <a:off x="519113" y="379413"/>
+            <a:ext cx="5897562" cy="533681"/>
+          </a:xfrm>
+          <a:prstGeom prst="rect">
+            <a:avLst/>
+          </a:prstGeom>
+          <a:noFill/>
+          <a:ln>
+            <a:noFill/>
+          </a:ln>
+          <a:extLst>
+            <a:ext uri="{909E8E84-426E-40DD-AFC4-6F175D3DCCD1}">
+              <a14:hiddenFill xmlns:a14="http://schemas.microsoft.com/office/drawing/2010/main">
+                <a:solidFill>
+                  <a:srgbClr val="FFFFFF"/>
+                </a:solidFill>
+              </a14:hiddenFill>
+            </a:ext>
+            <a:ext uri="{91240B29-F687-4F45-9708-019B960494DF}">
+              <a14:hiddenLine xmlns:a14="http://schemas.microsoft.com/office/drawing/2010/main" w="12700">
+                <a:solidFill>
+                  <a:srgbClr val="000000"/>
+                </a:solidFill>
+                <a:miter lim="800000"/>
+                <a:headEnd/>
+                <a:tailEnd/>
+              </a14:hiddenLine>
+            </a:ext>
+          </a:extLst>
+        </p:spPr>
+        <p:txBody>
+          <a:bodyPr lIns="82923" tIns="40734" rIns="82923" bIns="40734">
+            <a:normAutofit/>
+          </a:bodyPr>
+          <a:lstStyle>
+            <a:lvl1pPr defTabSz="838200">
+              <a:defRPr sz="2400">
+                <a:solidFill>
+                  <a:schemeClr val="tx1"/>
+                </a:solidFill>
+                <a:latin typeface="Times New Roman" panose="02020603050405020304" pitchFamily="18" charset="0"/>
+              </a:defRPr>
+            </a:lvl1pPr>
+            <a:lvl2pPr marL="742950" indent="-285750" defTabSz="838200">
+              <a:defRPr sz="2400">
+                <a:solidFill>
+                  <a:schemeClr val="tx1"/>
+                </a:solidFill>
+                <a:latin typeface="Times New Roman" panose="02020603050405020304" pitchFamily="18" charset="0"/>
+              </a:defRPr>
+            </a:lvl2pPr>
+            <a:lvl3pPr marL="1143000" indent="-228600" defTabSz="838200">
+              <a:defRPr sz="2400">
+                <a:solidFill>
+                  <a:schemeClr val="tx1"/>
+                </a:solidFill>
+                <a:latin typeface="Times New Roman" panose="02020603050405020304" pitchFamily="18" charset="0"/>
+              </a:defRPr>
+            </a:lvl3pPr>
+            <a:lvl4pPr marL="1600200" indent="-228600" defTabSz="838200">
+              <a:defRPr sz="2400">
+                <a:solidFill>
+                  <a:schemeClr val="tx1"/>
+                </a:solidFill>
+                <a:latin typeface="Times New Roman" panose="02020603050405020304" pitchFamily="18" charset="0"/>
+              </a:defRPr>
+            </a:lvl4pPr>
+            <a:lvl5pPr marL="2057400" indent="-228600" defTabSz="838200">
+              <a:defRPr sz="2400">
+                <a:solidFill>
+                  <a:schemeClr val="tx1"/>
+                </a:solidFill>
+                <a:latin typeface="Times New Roman" panose="02020603050405020304" pitchFamily="18" charset="0"/>
+              </a:defRPr>
+            </a:lvl5pPr>
+            <a:lvl6pPr marL="2514600" indent="-228600" defTabSz="838200" eaLnBrk="0" fontAlgn="base" hangingPunct="0">
+              <a:spcBef>
+                <a:spcPct val="0"/>
+              </a:spcBef>
+              <a:spcAft>
+                <a:spcPct val="0"/>
+              </a:spcAft>
+              <a:defRPr sz="2400">
+                <a:solidFill>
+                  <a:schemeClr val="tx1"/>
+                </a:solidFill>
+                <a:latin typeface="Times New Roman" panose="02020603050405020304" pitchFamily="18" charset="0"/>
+              </a:defRPr>
+            </a:lvl6pPr>
+            <a:lvl7pPr marL="2971800" indent="-228600" defTabSz="838200" eaLnBrk="0" fontAlgn="base" hangingPunct="0">
+              <a:spcBef>
+                <a:spcPct val="0"/>
+              </a:spcBef>
+              <a:spcAft>
+                <a:spcPct val="0"/>
+              </a:spcAft>
+              <a:defRPr sz="2400">
+                <a:solidFill>
+                  <a:schemeClr val="tx1"/>
+                </a:solidFill>
+                <a:latin typeface="Times New Roman" panose="02020603050405020304" pitchFamily="18" charset="0"/>
+              </a:defRPr>
+            </a:lvl7pPr>
+            <a:lvl8pPr marL="3429000" indent="-228600" defTabSz="838200" eaLnBrk="0" fontAlgn="base" hangingPunct="0">
+              <a:spcBef>
+                <a:spcPct val="0"/>
+              </a:spcBef>
+              <a:spcAft>
+                <a:spcPct val="0"/>
+              </a:spcAft>
+              <a:defRPr sz="2400">
+                <a:solidFill>
+                  <a:schemeClr val="tx1"/>
+                </a:solidFill>
+                <a:latin typeface="Times New Roman" panose="02020603050405020304" pitchFamily="18" charset="0"/>
+              </a:defRPr>
+            </a:lvl8pPr>
+            <a:lvl9pPr marL="3886200" indent="-228600" defTabSz="838200" eaLnBrk="0" fontAlgn="base" hangingPunct="0">
+              <a:spcBef>
+                <a:spcPct val="0"/>
+              </a:spcBef>
+              <a:spcAft>
+                <a:spcPct val="0"/>
+              </a:spcAft>
+              <a:defRPr sz="2400">
+                <a:solidFill>
+                  <a:schemeClr val="tx1"/>
+                </a:solidFill>
+                <a:latin typeface="Times New Roman" panose="02020603050405020304" pitchFamily="18" charset="0"/>
+              </a:defRPr>
+            </a:lvl9pPr>
+          </a:lstStyle>
+          <a:p>
+            <a:r>
+              <a:rPr lang="en-US" altLang="en-US" sz="1400" b="1" u="sng" dirty="0">
+                <a:latin typeface="Arial" panose="020B0604020202020204" pitchFamily="34" charset="0"/>
+                <a:ea typeface="Arial Bold" panose="020B0704020202020204" pitchFamily="34" charset="0"/>
+                <a:cs typeface="Arial" panose="020B0604020202020204" pitchFamily="34" charset="0"/>
+                <a:sym typeface="Arial Bold" panose="020B0704020202020204" pitchFamily="34" charset="0"/>
+              </a:rPr>
+              <a:t>PHOTO LAYOUT PLAN:</a:t>
+            </a:r>
+            <a:endParaRPr lang="en-US" altLang="en-US" sz="1400" b="1" dirty="0">
+              <a:latin typeface="Arial" panose="020B0604020202020204" pitchFamily="34" charset="0"/>
+              <a:ea typeface="Arial Bold" panose="020B0704020202020204" pitchFamily="34" charset="0"/>
+              <a:cs typeface="Arial" panose="020B0604020202020204" pitchFamily="34" charset="0"/>
+              <a:sym typeface="Arial" panose="020B0604020202020204" pitchFamily="34" charset="0"/>
+            </a:endParaRPr>
+          </a:p>
+        </p:txBody>
+      </p:sp>
+      <p:sp>
+        <p:nvSpPr>
+          <p:cNvPr id="13" name="Rectangle 4">
+            <a:extLst>
+              <a:ext uri="{FF2B5EF4-FFF2-40B4-BE49-F238E27FC236}">
+                <a16:creationId xmlns:a16="http://schemas.microsoft.com/office/drawing/2014/main" id="{FCF8BDA1-681E-6DD3-C176-9B9B6B89C973}"/>
+              </a:ext>
+            </a:extLst>
+          </p:cNvPr>
+          <p:cNvSpPr>
+            <a:spLocks noChangeArrowheads="1"/>
+          </p:cNvSpPr>
+          <p:nvPr/>
+        </p:nvSpPr>
+        <p:spPr bwMode="auto">
+          <a:xfrm>
+            <a:off x="5715000" y="150813"/>
+            <a:ext cx="1114841" cy="297707"/>
+          </a:xfrm>
+          <a:prstGeom prst="rect">
+            <a:avLst/>
+          </a:prstGeom>
+          <a:noFill/>
+          <a:ln>
+            <a:noFill/>
+          </a:ln>
+          <a:extLst>
+            <a:ext uri="{909E8E84-426E-40DD-AFC4-6F175D3DCCD1}">
+              <a14:hiddenFill xmlns:a14="http://schemas.microsoft.com/office/drawing/2010/main">
+                <a:solidFill>
+                  <a:srgbClr val="FFFFFF"/>
+                </a:solidFill>
+              </a14:hiddenFill>
+            </a:ext>
+            <a:ext uri="{91240B29-F687-4F45-9708-019B960494DF}">
+              <a14:hiddenLine xmlns:a14="http://schemas.microsoft.com/office/drawing/2010/main" w="12700">
+                <a:solidFill>
+                  <a:srgbClr val="000000"/>
+                </a:solidFill>
+                <a:miter lim="800000"/>
+                <a:headEnd/>
+                <a:tailEnd/>
+              </a14:hiddenLine>
+            </a:ext>
+          </a:extLst>
+        </p:spPr>
+        <p:txBody>
+          <a:bodyPr wrap="none" lIns="82923" tIns="40734" rIns="82923" bIns="40734">
+            <a:spAutoFit/>
+          </a:bodyPr>
+          <a:lstStyle>
+            <a:lvl1pPr defTabSz="838200">
+              <a:defRPr sz="2400">
+                <a:solidFill>
+                  <a:schemeClr val="tx1"/>
+                </a:solidFill>
+                <a:latin typeface="Times New Roman" panose="02020603050405020304" pitchFamily="18" charset="0"/>
+              </a:defRPr>
+            </a:lvl1pPr>
+            <a:lvl2pPr marL="742950" indent="-285750" defTabSz="838200">
+              <a:defRPr sz="2400">
+                <a:solidFill>
+                  <a:schemeClr val="tx1"/>
+                </a:solidFill>
+                <a:latin typeface="Times New Roman" panose="02020603050405020304" pitchFamily="18" charset="0"/>
+              </a:defRPr>
+            </a:lvl2pPr>
+            <a:lvl3pPr marL="1143000" indent="-228600" defTabSz="838200">
+              <a:defRPr sz="2400">
+                <a:solidFill>
+                  <a:schemeClr val="tx1"/>
+                </a:solidFill>
+                <a:latin typeface="Times New Roman" panose="02020603050405020304" pitchFamily="18" charset="0"/>
+              </a:defRPr>
+            </a:lvl3pPr>
+            <a:lvl4pPr marL="1600200" indent="-228600" defTabSz="838200">
+              <a:defRPr sz="2400">
+                <a:solidFill>
+                  <a:schemeClr val="tx1"/>
+                </a:solidFill>
+                <a:latin typeface="Times New Roman" panose="02020603050405020304" pitchFamily="18" charset="0"/>
+              </a:defRPr>
+            </a:lvl4pPr>
+            <a:lvl5pPr marL="2057400" indent="-228600" defTabSz="838200">
+              <a:defRPr sz="2400">
+                <a:solidFill>
+                  <a:schemeClr val="tx1"/>
+                </a:solidFill>
+                <a:latin typeface="Times New Roman" panose="02020603050405020304" pitchFamily="18" charset="0"/>
+              </a:defRPr>
+            </a:lvl5pPr>
+            <a:lvl6pPr marL="2514600" indent="-228600" defTabSz="838200" eaLnBrk="0" fontAlgn="base" hangingPunct="0">
+              <a:spcBef>
+                <a:spcPct val="0"/>
+              </a:spcBef>
+              <a:spcAft>
+                <a:spcPct val="0"/>
+              </a:spcAft>
+              <a:defRPr sz="2400">
+                <a:solidFill>
+                  <a:schemeClr val="tx1"/>
+                </a:solidFill>
+                <a:latin typeface="Times New Roman" panose="02020603050405020304" pitchFamily="18" charset="0"/>
+              </a:defRPr>
+            </a:lvl6pPr>
+            <a:lvl7pPr marL="2971800" indent="-228600" defTabSz="838200" eaLnBrk="0" fontAlgn="base" hangingPunct="0">
+              <a:spcBef>
+                <a:spcPct val="0"/>
+              </a:spcBef>
+              <a:spcAft>
+                <a:spcPct val="0"/>
+              </a:spcAft>
+              <a:defRPr sz="2400">
+                <a:solidFill>
+                  <a:schemeClr val="tx1"/>
+                </a:solidFill>
+                <a:latin typeface="Times New Roman" panose="02020603050405020304" pitchFamily="18" charset="0"/>
+              </a:defRPr>
+            </a:lvl7pPr>
+            <a:lvl8pPr marL="3429000" indent="-228600" defTabSz="838200" eaLnBrk="0" fontAlgn="base" hangingPunct="0">
+              <a:spcBef>
+                <a:spcPct val="0"/>
+              </a:spcBef>
+              <a:spcAft>
+                <a:spcPct val="0"/>
+              </a:spcAft>
+              <a:defRPr sz="2400">
+                <a:solidFill>
+                  <a:schemeClr val="tx1"/>
+                </a:solidFill>
+                <a:latin typeface="Times New Roman" panose="02020603050405020304" pitchFamily="18" charset="0"/>
+              </a:defRPr>
+            </a:lvl8pPr>
+            <a:lvl9pPr marL="3886200" indent="-228600" defTabSz="838200" eaLnBrk="0" fontAlgn="base" hangingPunct="0">
+              <a:spcBef>
+                <a:spcPct val="0"/>
+              </a:spcBef>
+              <a:spcAft>
+                <a:spcPct val="0"/>
+              </a:spcAft>
+              <a:defRPr sz="2400">
+                <a:solidFill>
+                  <a:schemeClr val="tx1"/>
+                </a:solidFill>
+                <a:latin typeface="Times New Roman" panose="02020603050405020304" pitchFamily="18" charset="0"/>
+              </a:defRPr>
+            </a:lvl9pPr>
+          </a:lstStyle>
+          <a:p>
+            <a:r>
+              <a:rPr lang="en-US" altLang="en-US" sz="1400" b="1" u="sng" dirty="0">
+                <a:latin typeface="Arial" panose="020B0604020202020204" pitchFamily="34" charset="0"/>
+              </a:rPr>
+              <a:t>SECTION 5</a:t>
+            </a:r>
+          </a:p>
+        </p:txBody>
+      </p:sp>
+      <p:sp>
+        <p:nvSpPr>
+          <p:cNvPr id="17" name="Text Box 8">
+            <a:extLst>
+              <a:ext uri="{FF2B5EF4-FFF2-40B4-BE49-F238E27FC236}">
+                <a16:creationId xmlns:a16="http://schemas.microsoft.com/office/drawing/2014/main" id="{BA4BEC13-9511-6657-4EF6-2598AB25E871}"/>
+              </a:ext>
+            </a:extLst>
+          </p:cNvPr>
+          <p:cNvSpPr txBox="1">
+            <a:spLocks noChangeArrowheads="1"/>
+          </p:cNvSpPr>
+          <p:nvPr/>
+        </p:nvSpPr>
+        <p:spPr bwMode="auto">
+          <a:xfrm>
+            <a:off x="0" y="9507538"/>
+            <a:ext cx="6858000" cy="244475"/>
+          </a:xfrm>
+          <a:prstGeom prst="rect">
+            <a:avLst/>
+          </a:prstGeom>
+          <a:noFill/>
+          <a:ln>
+            <a:noFill/>
+          </a:ln>
+          <a:extLst>
+            <a:ext uri="{909E8E84-426E-40DD-AFC4-6F175D3DCCD1}">
+              <a14:hiddenFill xmlns:a14="http://schemas.microsoft.com/office/drawing/2010/main">
+                <a:solidFill>
+                  <a:srgbClr val="FFFFFF"/>
+                </a:solidFill>
+              </a14:hiddenFill>
+            </a:ext>
+            <a:ext uri="{91240B29-F687-4F45-9708-019B960494DF}">
+              <a14:hiddenLine xmlns:a14="http://schemas.microsoft.com/office/drawing/2010/main" w="12700">
+                <a:solidFill>
+                  <a:srgbClr val="000000"/>
+                </a:solidFill>
+                <a:miter lim="800000"/>
+                <a:headEnd/>
+                <a:tailEnd/>
+              </a14:hiddenLine>
+            </a:ext>
+          </a:extLst>
+        </p:spPr>
+        <p:txBody>
+          <a:bodyPr>
+            <a:spAutoFit/>
+          </a:bodyPr>
+          <a:lstStyle>
+            <a:lvl1pPr>
+              <a:defRPr sz="2400">
+                <a:solidFill>
+                  <a:schemeClr val="tx1"/>
+                </a:solidFill>
+                <a:latin typeface="Times New Roman" panose="02020603050405020304" pitchFamily="18" charset="0"/>
+              </a:defRPr>
+            </a:lvl1pPr>
+            <a:lvl2pPr marL="742950" indent="-285750">
+              <a:defRPr sz="2400">
+                <a:solidFill>
+                  <a:schemeClr val="tx1"/>
+                </a:solidFill>
+                <a:latin typeface="Times New Roman" panose="02020603050405020304" pitchFamily="18" charset="0"/>
+              </a:defRPr>
+            </a:lvl2pPr>
+            <a:lvl3pPr marL="1143000" indent="-228600">
+              <a:defRPr sz="2400">
+                <a:solidFill>
+                  <a:schemeClr val="tx1"/>
+                </a:solidFill>
+                <a:latin typeface="Times New Roman" panose="02020603050405020304" pitchFamily="18" charset="0"/>
+              </a:defRPr>
+            </a:lvl3pPr>
+            <a:lvl4pPr marL="1600200" indent="-228600">
+              <a:defRPr sz="2400">
+                <a:solidFill>
+                  <a:schemeClr val="tx1"/>
+                </a:solidFill>
+                <a:latin typeface="Times New Roman" panose="02020603050405020304" pitchFamily="18" charset="0"/>
+              </a:defRPr>
+            </a:lvl4pPr>
+            <a:lvl5pPr marL="2057400" indent="-228600">
+              <a:defRPr sz="2400">
+                <a:solidFill>
+                  <a:schemeClr val="tx1"/>
+                </a:solidFill>
+                <a:latin typeface="Times New Roman" panose="02020603050405020304" pitchFamily="18" charset="0"/>
+              </a:defRPr>
+            </a:lvl5pPr>
+            <a:lvl6pPr marL="2514600" indent="-228600" eaLnBrk="0" fontAlgn="base" hangingPunct="0">
+              <a:spcBef>
+                <a:spcPct val="0"/>
+              </a:spcBef>
+              <a:spcAft>
+                <a:spcPct val="0"/>
+              </a:spcAft>
+              <a:defRPr sz="2400">
+                <a:solidFill>
+                  <a:schemeClr val="tx1"/>
+                </a:solidFill>
+                <a:latin typeface="Times New Roman" panose="02020603050405020304" pitchFamily="18" charset="0"/>
+              </a:defRPr>
+            </a:lvl6pPr>
+            <a:lvl7pPr marL="2971800" indent="-228600" eaLnBrk="0" fontAlgn="base" hangingPunct="0">
+              <a:spcBef>
+                <a:spcPct val="0"/>
+              </a:spcBef>
+              <a:spcAft>
+                <a:spcPct val="0"/>
+              </a:spcAft>
+              <a:defRPr sz="2400">
+                <a:solidFill>
+                  <a:schemeClr val="tx1"/>
+                </a:solidFill>
+                <a:latin typeface="Times New Roman" panose="02020603050405020304" pitchFamily="18" charset="0"/>
+              </a:defRPr>
+            </a:lvl7pPr>
+            <a:lvl8pPr marL="3429000" indent="-228600" eaLnBrk="0" fontAlgn="base" hangingPunct="0">
+              <a:spcBef>
+                <a:spcPct val="0"/>
+              </a:spcBef>
+              <a:spcAft>
+                <a:spcPct val="0"/>
+              </a:spcAft>
+              <a:defRPr sz="2400">
+                <a:solidFill>
+                  <a:schemeClr val="tx1"/>
+                </a:solidFill>
+                <a:latin typeface="Times New Roman" panose="02020603050405020304" pitchFamily="18" charset="0"/>
+              </a:defRPr>
+            </a:lvl8pPr>
+            <a:lvl9pPr marL="3886200" indent="-228600" eaLnBrk="0" fontAlgn="base" hangingPunct="0">
+              <a:spcBef>
+                <a:spcPct val="0"/>
+              </a:spcBef>
+              <a:spcAft>
+                <a:spcPct val="0"/>
+              </a:spcAft>
+              <a:defRPr sz="2400">
+                <a:solidFill>
+                  <a:schemeClr val="tx1"/>
+                </a:solidFill>
+                <a:latin typeface="Times New Roman" panose="02020603050405020304" pitchFamily="18" charset="0"/>
+              </a:defRPr>
+            </a:lvl9pPr>
+          </a:lstStyle>
+          <a:p>
+            <a:pPr algn="ctr">
+              <a:spcBef>
+                <a:spcPct val="50000"/>
+              </a:spcBef>
+            </a:pPr>
+            <a:r>
+              <a:rPr lang="en-US" altLang="en-US" sz="1000" b="1" dirty="0">
+                <a:latin typeface="Arial" panose="020B0604020202020204" pitchFamily="34" charset="0"/>
+              </a:rPr>
+              <a:t>2 - 01</a:t>
+            </a:r>
+          </a:p>
+        </p:txBody>
+      </p:sp>
+      <p:sp>
+        <p:nvSpPr>
+          <p:cNvPr id="7" name="Footer Placeholder 1">
+            <a:extLst>
+              <a:ext uri="{FF2B5EF4-FFF2-40B4-BE49-F238E27FC236}">
+                <a16:creationId xmlns:a16="http://schemas.microsoft.com/office/drawing/2014/main" id="{C0543923-1EC4-5AF5-CA4A-2BD4292F8DC3}"/>
+              </a:ext>
+            </a:extLst>
+          </p:cNvPr>
+          <p:cNvSpPr txBox="1">
+            <a:spLocks/>
+          </p:cNvSpPr>
+          <p:nvPr/>
+        </p:nvSpPr>
+        <p:spPr>
+          <a:xfrm>
+            <a:off x="2310606" y="191633"/>
+            <a:ext cx="2314575" cy="155643"/>
+          </a:xfrm>
+          <a:prstGeom prst="rect">
+            <a:avLst/>
+          </a:prstGeom>
+        </p:spPr>
+        <p:txBody>
+          <a:bodyPr vert="horz" lIns="91440" tIns="45720" rIns="91440" bIns="45720" rtlCol="0" anchor="ctr"/>
+          <a:lstStyle>
+            <a:defPPr>
+              <a:defRPr lang="en-US"/>
+            </a:defPPr>
+            <a:lvl1pPr marL="0" algn="ctr" defTabSz="457200" rtl="0" eaLnBrk="1" latinLnBrk="0" hangingPunct="1">
+              <a:defRPr sz="900" kern="1200">
+                <a:solidFill>
+                  <a:schemeClr val="tx1">
+                    <a:tint val="75000"/>
+                  </a:schemeClr>
+                </a:solidFill>
+                <a:latin typeface="+mn-lt"/>
+                <a:ea typeface="+mn-ea"/>
+                <a:cs typeface="+mn-cs"/>
+              </a:defRPr>
+            </a:lvl1pPr>
+            <a:lvl2pPr marL="457200" algn="l" defTabSz="457200" rtl="0" eaLnBrk="1" latinLnBrk="0" hangingPunct="1">
+              <a:defRPr sz="1800" kern="1200">
+                <a:solidFill>
+                  <a:schemeClr val="tx1"/>
+                </a:solidFill>
+                <a:latin typeface="+mn-lt"/>
+                <a:ea typeface="+mn-ea"/>
+                <a:cs typeface="+mn-cs"/>
+              </a:defRPr>
+            </a:lvl2pPr>
+            <a:lvl3pPr marL="914400" algn="l" defTabSz="457200" rtl="0" eaLnBrk="1" latinLnBrk="0" hangingPunct="1">
+              <a:defRPr sz="1800" kern="1200">
+                <a:solidFill>
+                  <a:schemeClr val="tx1"/>
+                </a:solidFill>
+                <a:latin typeface="+mn-lt"/>
+                <a:ea typeface="+mn-ea"/>
+                <a:cs typeface="+mn-cs"/>
+              </a:defRPr>
+            </a:lvl3pPr>
+            <a:lvl4pPr marL="1371600" algn="l" defTabSz="457200" rtl="0" eaLnBrk="1" latinLnBrk="0" hangingPunct="1">
+              <a:defRPr sz="1800" kern="1200">
+                <a:solidFill>
+                  <a:schemeClr val="tx1"/>
+                </a:solidFill>
+                <a:latin typeface="+mn-lt"/>
+                <a:ea typeface="+mn-ea"/>
+                <a:cs typeface="+mn-cs"/>
+              </a:defRPr>
+            </a:lvl4pPr>
+            <a:lvl5pPr marL="1828800" algn="l" defTabSz="457200" rtl="0" eaLnBrk="1" latinLnBrk="0" hangingPunct="1">
+              <a:defRPr sz="1800" kern="1200">
+                <a:solidFill>
+                  <a:schemeClr val="tx1"/>
+                </a:solidFill>
+                <a:latin typeface="+mn-lt"/>
+                <a:ea typeface="+mn-ea"/>
+                <a:cs typeface="+mn-cs"/>
+              </a:defRPr>
+            </a:lvl5pPr>
+            <a:lvl6pPr marL="2286000" algn="l" defTabSz="457200" rtl="0" eaLnBrk="1" latinLnBrk="0" hangingPunct="1">
+              <a:defRPr sz="1800" kern="1200">
+                <a:solidFill>
+                  <a:schemeClr val="tx1"/>
+                </a:solidFill>
+                <a:latin typeface="+mn-lt"/>
+                <a:ea typeface="+mn-ea"/>
+                <a:cs typeface="+mn-cs"/>
+              </a:defRPr>
+            </a:lvl6pPr>
+            <a:lvl7pPr marL="2743200" algn="l" defTabSz="457200" rtl="0" eaLnBrk="1" latinLnBrk="0" hangingPunct="1">
+              <a:defRPr sz="1800" kern="1200">
+                <a:solidFill>
+                  <a:schemeClr val="tx1"/>
+                </a:solidFill>
+                <a:latin typeface="+mn-lt"/>
+                <a:ea typeface="+mn-ea"/>
+                <a:cs typeface="+mn-cs"/>
+              </a:defRPr>
+            </a:lvl7pPr>
+            <a:lvl8pPr marL="3200400" algn="l" defTabSz="457200" rtl="0" eaLnBrk="1" latinLnBrk="0" hangingPunct="1">
+              <a:defRPr sz="1800" kern="1200">
+                <a:solidFill>
+                  <a:schemeClr val="tx1"/>
+                </a:solidFill>
+                <a:latin typeface="+mn-lt"/>
+                <a:ea typeface="+mn-ea"/>
+                <a:cs typeface="+mn-cs"/>
+              </a:defRPr>
+            </a:lvl8pPr>
+            <a:lvl9pPr marL="3657600" algn="l" defTabSz="457200" rtl="0" eaLnBrk="1" latinLnBrk="0" hangingPunct="1">
+              <a:defRPr sz="1800" kern="1200">
+                <a:solidFill>
+                  <a:schemeClr val="tx1"/>
+                </a:solidFill>
+                <a:latin typeface="+mn-lt"/>
+                <a:ea typeface="+mn-ea"/>
+                <a:cs typeface="+mn-cs"/>
+              </a:defRPr>
+            </a:lvl9pPr>
+          </a:lstStyle>
+          <a:p>
+            <a:r>
+              <a:rPr lang="en-SG" dirty="0"/>
+              <a:t>FIRETRACK AI</a:t>
+            </a:r>
+          </a:p>
+        </p:txBody>
+      </p:sp>
+    </p:spTree>
+    <p:extLst>
+      <p:ext uri="{BB962C8B-B14F-4D97-AF65-F5344CB8AC3E}">
+        <p14:creationId xmlns:p14="http://schemas.microsoft.com/office/powerpoint/2010/main" val="1776737012"/>
+      </p:ext>
+    </p:extLst>
+  </p:cSld>
+  <p:clrMapOvr>
+    <a:masterClrMapping/>
+  </p:clrMapOvr>
+</p:sld>
+</file>
+
+<file path=ppt/slides/slide6.xml><?xml version="1.0" encoding="utf-8"?>
 <p:sld xmlns:a="http://schemas.openxmlformats.org/drawingml/2006/main" xmlns:r="http://schemas.openxmlformats.org/officeDocument/2006/relationships" xmlns:p="http://schemas.openxmlformats.org/presentationml/2006/main">
   <p:cSld>
     <p:spTree>
@@ -6441,7 +7967,7 @@
               <a:rPr lang="en-US" altLang="en-US" sz="1400" b="1" u="sng" dirty="0">
                 <a:latin typeface="Arial" panose="020B0604020202020204" pitchFamily="34" charset="0"/>
               </a:rPr>
-              <a:t>SECTION 4</a:t>
+              <a:t>SECTION 6</a:t>
             </a:r>
           </a:p>
         </p:txBody>
